--- a/Teaching/Chemistry/Labs/FCC Chem 3A Expt 1a Making Measurements.pptx
+++ b/Teaching/Chemistry/Labs/FCC Chem 3A Expt 1a Making Measurements.pptx
@@ -5,7 +5,7 @@
     <p:sldMasterId id="2147483803" r:id="rId1"/>
   </p:sldMasterIdLst>
   <p:notesMasterIdLst>
-    <p:notesMasterId r:id="rId16"/>
+    <p:notesMasterId r:id="rId19"/>
   </p:notesMasterIdLst>
   <p:sldIdLst>
     <p:sldId id="608" r:id="rId2"/>
@@ -22,6 +22,9 @@
     <p:sldId id="620" r:id="rId13"/>
     <p:sldId id="621" r:id="rId14"/>
     <p:sldId id="622" r:id="rId15"/>
+    <p:sldId id="624" r:id="rId16"/>
+    <p:sldId id="625" r:id="rId17"/>
+    <p:sldId id="626" r:id="rId18"/>
   </p:sldIdLst>
   <p:sldSz cx="9144000" cy="6858000" type="screen4x3"/>
   <p:notesSz cx="7315200" cy="9601200"/>
@@ -11833,6 +11836,297 @@
     <p:extLst>
       <p:ext uri="{BB962C8B-B14F-4D97-AF65-F5344CB8AC3E}">
         <p14:creationId xmlns:p14="http://schemas.microsoft.com/office/powerpoint/2010/main" val="1540067363"/>
+      </p:ext>
+    </p:extLst>
+  </p:cSld>
+  <p:clrMapOvr>
+    <a:masterClrMapping/>
+  </p:clrMapOvr>
+</p:sld>
+</file>
+
+<file path=ppt/slides/slide15.xml><?xml version="1.0" encoding="utf-8"?>
+<p:sld xmlns:a="http://schemas.openxmlformats.org/drawingml/2006/main" xmlns:r="http://schemas.openxmlformats.org/officeDocument/2006/relationships" xmlns:p="http://schemas.openxmlformats.org/presentationml/2006/main">
+  <p:cSld>
+    <p:spTree>
+      <p:nvGrpSpPr>
+        <p:cNvPr id="1" name=""/>
+        <p:cNvGrpSpPr/>
+        <p:nvPr/>
+      </p:nvGrpSpPr>
+      <p:grpSpPr>
+        <a:xfrm>
+          <a:off x="0" y="0"/>
+          <a:ext cx="0" cy="0"/>
+          <a:chOff x="0" y="0"/>
+          <a:chExt cx="0" cy="0"/>
+        </a:xfrm>
+      </p:grpSpPr>
+      <p:sp>
+        <p:nvSpPr>
+          <p:cNvPr id="2" name="Title 1">
+            <a:extLst>
+              <a:ext uri="{FF2B5EF4-FFF2-40B4-BE49-F238E27FC236}">
+                <a16:creationId xmlns:a16="http://schemas.microsoft.com/office/drawing/2014/main" id="{94795733-F695-DDF3-E03B-0ED7D41246B2}"/>
+              </a:ext>
+            </a:extLst>
+          </p:cNvPr>
+          <p:cNvSpPr>
+            <a:spLocks noGrp="1"/>
+          </p:cNvSpPr>
+          <p:nvPr>
+            <p:ph type="title"/>
+          </p:nvPr>
+        </p:nvSpPr>
+        <p:spPr>
+          <a:xfrm>
+            <a:off x="349955" y="363788"/>
+            <a:ext cx="3093835" cy="2316782"/>
+          </a:xfrm>
+        </p:spPr>
+        <p:txBody>
+          <a:bodyPr/>
+          <a:lstStyle/>
+          <a:p>
+            <a:r>
+              <a:rPr lang="en-US" dirty="0"/>
+              <a:t>Example Data Analysis</a:t>
+            </a:r>
+          </a:p>
+        </p:txBody>
+      </p:sp>
+      <p:pic>
+        <p:nvPicPr>
+          <p:cNvPr id="7" name="Picture 6">
+            <a:extLst>
+              <a:ext uri="{FF2B5EF4-FFF2-40B4-BE49-F238E27FC236}">
+                <a16:creationId xmlns:a16="http://schemas.microsoft.com/office/drawing/2014/main" id="{88D382A3-848F-331E-79E9-49F9D1528351}"/>
+              </a:ext>
+            </a:extLst>
+          </p:cNvPr>
+          <p:cNvPicPr>
+            <a:picLocks noChangeAspect="1"/>
+          </p:cNvPicPr>
+          <p:nvPr/>
+        </p:nvPicPr>
+        <p:blipFill>
+          <a:blip r:embed="rId2"/>
+          <a:stretch>
+            <a:fillRect/>
+          </a:stretch>
+        </p:blipFill>
+        <p:spPr>
+          <a:xfrm>
+            <a:off x="3443790" y="0"/>
+            <a:ext cx="5488134" cy="6858000"/>
+          </a:xfrm>
+          <a:prstGeom prst="rect">
+            <a:avLst/>
+          </a:prstGeom>
+        </p:spPr>
+      </p:pic>
+    </p:spTree>
+    <p:extLst>
+      <p:ext uri="{BB962C8B-B14F-4D97-AF65-F5344CB8AC3E}">
+        <p14:creationId xmlns:p14="http://schemas.microsoft.com/office/powerpoint/2010/main" val="4000680803"/>
+      </p:ext>
+    </p:extLst>
+  </p:cSld>
+  <p:clrMapOvr>
+    <a:masterClrMapping/>
+  </p:clrMapOvr>
+</p:sld>
+</file>
+
+<file path=ppt/slides/slide16.xml><?xml version="1.0" encoding="utf-8"?>
+<p:sld xmlns:a="http://schemas.openxmlformats.org/drawingml/2006/main" xmlns:r="http://schemas.openxmlformats.org/officeDocument/2006/relationships" xmlns:p="http://schemas.openxmlformats.org/presentationml/2006/main">
+  <p:cSld>
+    <p:spTree>
+      <p:nvGrpSpPr>
+        <p:cNvPr id="1" name="">
+          <a:extLst>
+            <a:ext uri="{FF2B5EF4-FFF2-40B4-BE49-F238E27FC236}">
+              <a16:creationId xmlns:a16="http://schemas.microsoft.com/office/drawing/2014/main" id="{9B83F8EE-2522-3ABD-EC69-53FE23EEBFBC}"/>
+            </a:ext>
+          </a:extLst>
+        </p:cNvPr>
+        <p:cNvGrpSpPr/>
+        <p:nvPr/>
+      </p:nvGrpSpPr>
+      <p:grpSpPr>
+        <a:xfrm>
+          <a:off x="0" y="0"/>
+          <a:ext cx="0" cy="0"/>
+          <a:chOff x="0" y="0"/>
+          <a:chExt cx="0" cy="0"/>
+        </a:xfrm>
+      </p:grpSpPr>
+      <p:sp>
+        <p:nvSpPr>
+          <p:cNvPr id="2" name="Title 1">
+            <a:extLst>
+              <a:ext uri="{FF2B5EF4-FFF2-40B4-BE49-F238E27FC236}">
+                <a16:creationId xmlns:a16="http://schemas.microsoft.com/office/drawing/2014/main" id="{4E34E90A-8549-6EDD-31B4-C23A942D3B34}"/>
+              </a:ext>
+            </a:extLst>
+          </p:cNvPr>
+          <p:cNvSpPr>
+            <a:spLocks noGrp="1"/>
+          </p:cNvSpPr>
+          <p:nvPr>
+            <p:ph type="title"/>
+          </p:nvPr>
+        </p:nvSpPr>
+        <p:spPr>
+          <a:xfrm>
+            <a:off x="349955" y="363788"/>
+            <a:ext cx="3093835" cy="2316782"/>
+          </a:xfrm>
+        </p:spPr>
+        <p:txBody>
+          <a:bodyPr/>
+          <a:lstStyle/>
+          <a:p>
+            <a:r>
+              <a:rPr lang="en-US" dirty="0"/>
+              <a:t>Example Data Analysis</a:t>
+            </a:r>
+          </a:p>
+        </p:txBody>
+      </p:sp>
+      <p:pic>
+        <p:nvPicPr>
+          <p:cNvPr id="4" name="Picture 3">
+            <a:extLst>
+              <a:ext uri="{FF2B5EF4-FFF2-40B4-BE49-F238E27FC236}">
+                <a16:creationId xmlns:a16="http://schemas.microsoft.com/office/drawing/2014/main" id="{D2CFDA83-A6D9-B37F-FC24-9EE6A89B4CDC}"/>
+              </a:ext>
+            </a:extLst>
+          </p:cNvPr>
+          <p:cNvPicPr>
+            <a:picLocks noChangeAspect="1"/>
+          </p:cNvPicPr>
+          <p:nvPr/>
+        </p:nvPicPr>
+        <p:blipFill>
+          <a:blip r:embed="rId2"/>
+          <a:stretch>
+            <a:fillRect/>
+          </a:stretch>
+        </p:blipFill>
+        <p:spPr>
+          <a:xfrm>
+            <a:off x="3321762" y="0"/>
+            <a:ext cx="5673980" cy="6858000"/>
+          </a:xfrm>
+          <a:prstGeom prst="rect">
+            <a:avLst/>
+          </a:prstGeom>
+        </p:spPr>
+      </p:pic>
+    </p:spTree>
+    <p:extLst>
+      <p:ext uri="{BB962C8B-B14F-4D97-AF65-F5344CB8AC3E}">
+        <p14:creationId xmlns:p14="http://schemas.microsoft.com/office/powerpoint/2010/main" val="2533945278"/>
+      </p:ext>
+    </p:extLst>
+  </p:cSld>
+  <p:clrMapOvr>
+    <a:masterClrMapping/>
+  </p:clrMapOvr>
+</p:sld>
+</file>
+
+<file path=ppt/slides/slide17.xml><?xml version="1.0" encoding="utf-8"?>
+<p:sld xmlns:a="http://schemas.openxmlformats.org/drawingml/2006/main" xmlns:r="http://schemas.openxmlformats.org/officeDocument/2006/relationships" xmlns:p="http://schemas.openxmlformats.org/presentationml/2006/main">
+  <p:cSld>
+    <p:spTree>
+      <p:nvGrpSpPr>
+        <p:cNvPr id="1" name="">
+          <a:extLst>
+            <a:ext uri="{FF2B5EF4-FFF2-40B4-BE49-F238E27FC236}">
+              <a16:creationId xmlns:a16="http://schemas.microsoft.com/office/drawing/2014/main" id="{FC1BEA05-6BE5-B052-8DBB-447A5E86882F}"/>
+            </a:ext>
+          </a:extLst>
+        </p:cNvPr>
+        <p:cNvGrpSpPr/>
+        <p:nvPr/>
+      </p:nvGrpSpPr>
+      <p:grpSpPr>
+        <a:xfrm>
+          <a:off x="0" y="0"/>
+          <a:ext cx="0" cy="0"/>
+          <a:chOff x="0" y="0"/>
+          <a:chExt cx="0" cy="0"/>
+        </a:xfrm>
+      </p:grpSpPr>
+      <p:sp>
+        <p:nvSpPr>
+          <p:cNvPr id="2" name="Title 1">
+            <a:extLst>
+              <a:ext uri="{FF2B5EF4-FFF2-40B4-BE49-F238E27FC236}">
+                <a16:creationId xmlns:a16="http://schemas.microsoft.com/office/drawing/2014/main" id="{DD3AD7F0-2153-BB77-9D8D-DC18C1AE5DFD}"/>
+              </a:ext>
+            </a:extLst>
+          </p:cNvPr>
+          <p:cNvSpPr>
+            <a:spLocks noGrp="1"/>
+          </p:cNvSpPr>
+          <p:nvPr>
+            <p:ph type="title"/>
+          </p:nvPr>
+        </p:nvSpPr>
+        <p:spPr>
+          <a:xfrm>
+            <a:off x="349955" y="363788"/>
+            <a:ext cx="3093835" cy="2316782"/>
+          </a:xfrm>
+        </p:spPr>
+        <p:txBody>
+          <a:bodyPr/>
+          <a:lstStyle/>
+          <a:p>
+            <a:r>
+              <a:rPr lang="en-US" dirty="0"/>
+              <a:t>Example Data Analysis</a:t>
+            </a:r>
+          </a:p>
+        </p:txBody>
+      </p:sp>
+      <p:pic>
+        <p:nvPicPr>
+          <p:cNvPr id="7" name="Picture 6">
+            <a:extLst>
+              <a:ext uri="{FF2B5EF4-FFF2-40B4-BE49-F238E27FC236}">
+                <a16:creationId xmlns:a16="http://schemas.microsoft.com/office/drawing/2014/main" id="{3A91EB57-1B10-5FC7-3D85-150FE0E8B8F4}"/>
+              </a:ext>
+            </a:extLst>
+          </p:cNvPr>
+          <p:cNvPicPr>
+            <a:picLocks noChangeAspect="1"/>
+          </p:cNvPicPr>
+          <p:nvPr/>
+        </p:nvPicPr>
+        <p:blipFill>
+          <a:blip r:embed="rId2"/>
+          <a:stretch>
+            <a:fillRect/>
+          </a:stretch>
+        </p:blipFill>
+        <p:spPr>
+          <a:xfrm>
+            <a:off x="3029269" y="0"/>
+            <a:ext cx="6114731" cy="6858000"/>
+          </a:xfrm>
+          <a:prstGeom prst="rect">
+            <a:avLst/>
+          </a:prstGeom>
+        </p:spPr>
+      </p:pic>
+    </p:spTree>
+    <p:extLst>
+      <p:ext uri="{BB962C8B-B14F-4D97-AF65-F5344CB8AC3E}">
+        <p14:creationId xmlns:p14="http://schemas.microsoft.com/office/powerpoint/2010/main" val="4152351148"/>
       </p:ext>
     </p:extLst>
   </p:cSld>
